--- a/assets/powerpoints/module-alimentation/C2-le-petit-mot-en.pptx
+++ b/assets/powerpoints/module-alimentation/C2-le-petit-mot-en.pptx
@@ -8517,7 +8517,25 @@
                 </a:solidFill>
                 <a:latin typeface="Verdana"/>
               </a:rPr>
-              <a:t>« J'en veux quatre », jamais « je veux en quatre ». Au passé composé, il passe devant l'auxiliaire : « j'&lt;b&gt;en&lt;/b&gt; ai pris deux ». C'est l'inverse de plusieurs langues, et c'est ce qui demande de la pratique.</a:t>
+              <a:t>« J'en veux quatre », jamais « je veux en quatre ». Au passé composé, il passe devant l'auxiliaire : « j'</a:t>
+            </a:r>
+            <a:r>
+              <a:rPr sz="2000" b="1" i="0">
+                <a:solidFill>
+                  <a:srgbClr val="4B4F52"/>
+                </a:solidFill>
+                <a:latin typeface="Verdana"/>
+              </a:rPr>
+              <a:t>en</a:t>
+            </a:r>
+            <a:r>
+              <a:rPr sz="2000" b="0" i="0">
+                <a:solidFill>
+                  <a:srgbClr val="4B4F52"/>
+                </a:solidFill>
+                <a:latin typeface="Verdana"/>
+              </a:rPr>
+              <a:t> ai pris deux ». C'est l'inverse de plusieurs langues, et c'est ce qui demande de la pratique.</a:t>
             </a:r>
           </a:p>
         </p:txBody>
@@ -8864,7 +8882,61 @@
                 </a:solidFill>
                 <a:latin typeface="Verdana"/>
               </a:rPr>
-              <a:t>« J'en veux &lt;b&gt;quatre&lt;/b&gt;. » · « J'en prends &lt;b&gt;une livre&lt;/b&gt;. » · « Il m'en reste &lt;b&gt;trois&lt;/b&gt;. » Le produit disparaît, la quantité demeure. C'est justement ce qui rend le mot utile au comptoir.</a:t>
+              <a:t>« J'en veux </a:t>
+            </a:r>
+            <a:r>
+              <a:rPr sz="2000" b="1" i="0">
+                <a:solidFill>
+                  <a:srgbClr val="4B4F52"/>
+                </a:solidFill>
+                <a:latin typeface="Verdana"/>
+              </a:rPr>
+              <a:t>quatre</a:t>
+            </a:r>
+            <a:r>
+              <a:rPr sz="2000" b="0" i="0">
+                <a:solidFill>
+                  <a:srgbClr val="4B4F52"/>
+                </a:solidFill>
+                <a:latin typeface="Verdana"/>
+              </a:rPr>
+              <a:t>. » · « J'en prends </a:t>
+            </a:r>
+            <a:r>
+              <a:rPr sz="2000" b="1" i="0">
+                <a:solidFill>
+                  <a:srgbClr val="4B4F52"/>
+                </a:solidFill>
+                <a:latin typeface="Verdana"/>
+              </a:rPr>
+              <a:t>une livre</a:t>
+            </a:r>
+            <a:r>
+              <a:rPr sz="2000" b="0" i="0">
+                <a:solidFill>
+                  <a:srgbClr val="4B4F52"/>
+                </a:solidFill>
+                <a:latin typeface="Verdana"/>
+              </a:rPr>
+              <a:t>. » · « Il m'en reste </a:t>
+            </a:r>
+            <a:r>
+              <a:rPr sz="2000" b="1" i="0">
+                <a:solidFill>
+                  <a:srgbClr val="4B4F52"/>
+                </a:solidFill>
+                <a:latin typeface="Verdana"/>
+              </a:rPr>
+              <a:t>trois</a:t>
+            </a:r>
+            <a:r>
+              <a:rPr sz="2000" b="0" i="0">
+                <a:solidFill>
+                  <a:srgbClr val="4B4F52"/>
+                </a:solidFill>
+                <a:latin typeface="Verdana"/>
+              </a:rPr>
+              <a:t>. » Le produit disparaît, la quantité demeure. C'est justement ce qui rend le mot utile au comptoir.</a:t>
             </a:r>
           </a:p>
         </p:txBody>
@@ -9413,7 +9485,25 @@
                 </a:solidFill>
                 <a:latin typeface="Verdana"/>
               </a:rPr>
-              <a:t>Le produit est déjà dans le &lt;b&gt;en&lt;/b&gt;. Le répéter est une faute, et elle s'entend immédiatement — comme si on disait deux fois le même mot. La phrase juste est plus courte, et c'est tout l'intérêt.</a:t>
+              <a:t>Le produit est déjà dans le </a:t>
+            </a:r>
+            <a:r>
+              <a:rPr sz="2000" b="1" i="0">
+                <a:solidFill>
+                  <a:srgbClr val="4B4F52"/>
+                </a:solidFill>
+                <a:latin typeface="Verdana"/>
+              </a:rPr>
+              <a:t>en</a:t>
+            </a:r>
+            <a:r>
+              <a:rPr sz="2000" b="0" i="0">
+                <a:solidFill>
+                  <a:srgbClr val="4B4F52"/>
+                </a:solidFill>
+                <a:latin typeface="Verdana"/>
+              </a:rPr>
+              <a:t>. Le répéter est une faute, et elle s'entend immédiatement — comme si on disait deux fois le même mot. La phrase juste est plus courte, et c'est tout l'intérêt.</a:t>
             </a:r>
           </a:p>
         </p:txBody>
